--- a/examples/report-slides/deck.pptx
+++ b/examples/report-slides/deck.pptx
@@ -3119,11 +3119,6 @@
             <a:avLst/>
           </a:prstGeom>
         </p:spPr>
-        <p:extLst>
-          <p:ext uri="{96DAC541-7B7A-43D3-8B79-37D633B846F1}">
-            <asvg:svgBlip xmlns:asvg="http://schemas.microsoft.com/office/drawing/2016/SVG/main" xmlns:r="http://schemas.openxmlformats.org/officeDocument/2006/relationships" r:embed="rId3"/>
-          </p:ext>
-        </p:extLst>
       </p:pic>
     </p:spTree>
   </p:cSld>
@@ -3166,11 +3161,6 @@
             <a:avLst/>
           </a:prstGeom>
         </p:spPr>
-        <p:extLst>
-          <p:ext uri="{96DAC541-7B7A-43D3-8B79-37D633B846F1}">
-            <asvg:svgBlip xmlns:asvg="http://schemas.microsoft.com/office/drawing/2016/SVG/main" xmlns:r="http://schemas.openxmlformats.org/officeDocument/2006/relationships" r:embed="rId3"/>
-          </p:ext>
-        </p:extLst>
       </p:pic>
     </p:spTree>
   </p:cSld>
@@ -3213,11 +3203,6 @@
             <a:avLst/>
           </a:prstGeom>
         </p:spPr>
-        <p:extLst>
-          <p:ext uri="{96DAC541-7B7A-43D3-8B79-37D633B846F1}">
-            <asvg:svgBlip xmlns:asvg="http://schemas.microsoft.com/office/drawing/2016/SVG/main" xmlns:r="http://schemas.openxmlformats.org/officeDocument/2006/relationships" r:embed="rId3"/>
-          </p:ext>
-        </p:extLst>
       </p:pic>
     </p:spTree>
   </p:cSld>
@@ -3260,11 +3245,6 @@
             <a:avLst/>
           </a:prstGeom>
         </p:spPr>
-        <p:extLst>
-          <p:ext uri="{96DAC541-7B7A-43D3-8B79-37D633B846F1}">
-            <asvg:svgBlip xmlns:asvg="http://schemas.microsoft.com/office/drawing/2016/SVG/main" xmlns:r="http://schemas.openxmlformats.org/officeDocument/2006/relationships" r:embed="rId3"/>
-          </p:ext>
-        </p:extLst>
       </p:pic>
     </p:spTree>
   </p:cSld>
@@ -3307,11 +3287,6 @@
             <a:avLst/>
           </a:prstGeom>
         </p:spPr>
-        <p:extLst>
-          <p:ext uri="{96DAC541-7B7A-43D3-8B79-37D633B846F1}">
-            <asvg:svgBlip xmlns:asvg="http://schemas.microsoft.com/office/drawing/2016/SVG/main" xmlns:r="http://schemas.openxmlformats.org/officeDocument/2006/relationships" r:embed="rId3"/>
-          </p:ext>
-        </p:extLst>
       </p:pic>
     </p:spTree>
   </p:cSld>
@@ -3354,11 +3329,6 @@
             <a:avLst/>
           </a:prstGeom>
         </p:spPr>
-        <p:extLst>
-          <p:ext uri="{96DAC541-7B7A-43D3-8B79-37D633B846F1}">
-            <asvg:svgBlip xmlns:asvg="http://schemas.microsoft.com/office/drawing/2016/SVG/main" xmlns:r="http://schemas.openxmlformats.org/officeDocument/2006/relationships" r:embed="rId3"/>
-          </p:ext>
-        </p:extLst>
       </p:pic>
     </p:spTree>
   </p:cSld>
@@ -3401,11 +3371,6 @@
             <a:avLst/>
           </a:prstGeom>
         </p:spPr>
-        <p:extLst>
-          <p:ext uri="{96DAC541-7B7A-43D3-8B79-37D633B846F1}">
-            <asvg:svgBlip xmlns:asvg="http://schemas.microsoft.com/office/drawing/2016/SVG/main" xmlns:r="http://schemas.openxmlformats.org/officeDocument/2006/relationships" r:embed="rId3"/>
-          </p:ext>
-        </p:extLst>
       </p:pic>
     </p:spTree>
   </p:cSld>
@@ -3448,11 +3413,6 @@
             <a:avLst/>
           </a:prstGeom>
         </p:spPr>
-        <p:extLst>
-          <p:ext uri="{96DAC541-7B7A-43D3-8B79-37D633B846F1}">
-            <asvg:svgBlip xmlns:asvg="http://schemas.microsoft.com/office/drawing/2016/SVG/main" xmlns:r="http://schemas.openxmlformats.org/officeDocument/2006/relationships" r:embed="rId3"/>
-          </p:ext>
-        </p:extLst>
       </p:pic>
     </p:spTree>
   </p:cSld>
@@ -3495,11 +3455,6 @@
             <a:avLst/>
           </a:prstGeom>
         </p:spPr>
-        <p:extLst>
-          <p:ext uri="{96DAC541-7B7A-43D3-8B79-37D633B846F1}">
-            <asvg:svgBlip xmlns:asvg="http://schemas.microsoft.com/office/drawing/2016/SVG/main" xmlns:r="http://schemas.openxmlformats.org/officeDocument/2006/relationships" r:embed="rId3"/>
-          </p:ext>
-        </p:extLst>
       </p:pic>
     </p:spTree>
   </p:cSld>
